--- a/第一週_課堂規定_成績評量標準及課程設計.pptx
+++ b/第一週_課堂規定_成績評量標準及課程設計.pptx
@@ -206,7 +206,7 @@
           <a:p>
             <a:fld id="{31A8676C-D457-4A0B-9C91-83939419494E}" type="datetimeFigureOut">
               <a:rPr lang="zh-TW" altLang="en-US" smtClean="0"/>
-              <a:t>2026/7/11</a:t>
+              <a:t>2026/8/12</a:t>
             </a:fld>
             <a:endParaRPr lang="zh-TW" altLang="en-US"/>
           </a:p>
@@ -694,7 +694,7 @@
           <a:p>
             <a:fld id="{6930F9A4-4469-4216-8732-74830AAB3356}" type="datetimeFigureOut">
               <a:rPr lang="zh-TW" altLang="en-US" smtClean="0"/>
-              <a:t>2026/7/11</a:t>
+              <a:t>2026/8/12</a:t>
             </a:fld>
             <a:endParaRPr lang="zh-TW" altLang="en-US"/>
           </a:p>
@@ -864,7 +864,7 @@
           <a:p>
             <a:fld id="{6930F9A4-4469-4216-8732-74830AAB3356}" type="datetimeFigureOut">
               <a:rPr lang="zh-TW" altLang="en-US" smtClean="0"/>
-              <a:t>2026/7/11</a:t>
+              <a:t>2026/8/12</a:t>
             </a:fld>
             <a:endParaRPr lang="zh-TW" altLang="en-US"/>
           </a:p>
@@ -1044,7 +1044,7 @@
           <a:p>
             <a:fld id="{6930F9A4-4469-4216-8732-74830AAB3356}" type="datetimeFigureOut">
               <a:rPr lang="zh-TW" altLang="en-US" smtClean="0"/>
-              <a:t>2026/7/11</a:t>
+              <a:t>2026/8/12</a:t>
             </a:fld>
             <a:endParaRPr lang="zh-TW" altLang="en-US"/>
           </a:p>
@@ -1214,7 +1214,7 @@
           <a:p>
             <a:fld id="{6930F9A4-4469-4216-8732-74830AAB3356}" type="datetimeFigureOut">
               <a:rPr lang="zh-TW" altLang="en-US" smtClean="0"/>
-              <a:t>2026/7/11</a:t>
+              <a:t>2026/8/12</a:t>
             </a:fld>
             <a:endParaRPr lang="zh-TW" altLang="en-US"/>
           </a:p>
@@ -1460,7 +1460,7 @@
           <a:p>
             <a:fld id="{6930F9A4-4469-4216-8732-74830AAB3356}" type="datetimeFigureOut">
               <a:rPr lang="zh-TW" altLang="en-US" smtClean="0"/>
-              <a:t>2026/7/11</a:t>
+              <a:t>2026/8/12</a:t>
             </a:fld>
             <a:endParaRPr lang="zh-TW" altLang="en-US"/>
           </a:p>
@@ -1692,7 +1692,7 @@
           <a:p>
             <a:fld id="{6930F9A4-4469-4216-8732-74830AAB3356}" type="datetimeFigureOut">
               <a:rPr lang="zh-TW" altLang="en-US" smtClean="0"/>
-              <a:t>2026/7/11</a:t>
+              <a:t>2026/8/12</a:t>
             </a:fld>
             <a:endParaRPr lang="zh-TW" altLang="en-US"/>
           </a:p>
@@ -2059,7 +2059,7 @@
           <a:p>
             <a:fld id="{6930F9A4-4469-4216-8732-74830AAB3356}" type="datetimeFigureOut">
               <a:rPr lang="zh-TW" altLang="en-US" smtClean="0"/>
-              <a:t>2026/7/11</a:t>
+              <a:t>2026/8/12</a:t>
             </a:fld>
             <a:endParaRPr lang="zh-TW" altLang="en-US"/>
           </a:p>
@@ -2177,7 +2177,7 @@
           <a:p>
             <a:fld id="{6930F9A4-4469-4216-8732-74830AAB3356}" type="datetimeFigureOut">
               <a:rPr lang="zh-TW" altLang="en-US" smtClean="0"/>
-              <a:t>2026/7/11</a:t>
+              <a:t>2026/8/12</a:t>
             </a:fld>
             <a:endParaRPr lang="zh-TW" altLang="en-US"/>
           </a:p>
@@ -2272,7 +2272,7 @@
           <a:p>
             <a:fld id="{6930F9A4-4469-4216-8732-74830AAB3356}" type="datetimeFigureOut">
               <a:rPr lang="zh-TW" altLang="en-US" smtClean="0"/>
-              <a:t>2026/7/11</a:t>
+              <a:t>2026/8/12</a:t>
             </a:fld>
             <a:endParaRPr lang="zh-TW" altLang="en-US"/>
           </a:p>
@@ -2549,7 +2549,7 @@
           <a:p>
             <a:fld id="{6930F9A4-4469-4216-8732-74830AAB3356}" type="datetimeFigureOut">
               <a:rPr lang="zh-TW" altLang="en-US" smtClean="0"/>
-              <a:t>2026/7/11</a:t>
+              <a:t>2026/8/12</a:t>
             </a:fld>
             <a:endParaRPr lang="zh-TW" altLang="en-US"/>
           </a:p>
@@ -2802,7 +2802,7 @@
           <a:p>
             <a:fld id="{6930F9A4-4469-4216-8732-74830AAB3356}" type="datetimeFigureOut">
               <a:rPr lang="zh-TW" altLang="en-US" smtClean="0"/>
-              <a:t>2026/7/11</a:t>
+              <a:t>2026/8/12</a:t>
             </a:fld>
             <a:endParaRPr lang="zh-TW" altLang="en-US"/>
           </a:p>
@@ -3015,7 +3015,7 @@
           <a:p>
             <a:fld id="{6930F9A4-4469-4216-8732-74830AAB3356}" type="datetimeFigureOut">
               <a:rPr lang="zh-TW" altLang="en-US" smtClean="0"/>
-              <a:t>2026/7/11</a:t>
+              <a:t>2026/8/12</a:t>
             </a:fld>
             <a:endParaRPr lang="zh-TW" altLang="en-US"/>
           </a:p>
@@ -3497,14 +3497,14 @@
               </a:rPr>
             </a:br>
             <a:r>
-              <a:rPr lang="zh-TW" altLang="en-US" dirty="0" smtClean="0">
+              <a:rPr lang="zh-TW" altLang="en-US" dirty="0">
                 <a:solidFill>
                   <a:srgbClr val="0000FF"/>
                 </a:solidFill>
                 <a:latin typeface="標楷體" panose="03000509000000000000" pitchFamily="65" charset="-120"/>
                 <a:ea typeface="標楷體" panose="03000509000000000000" pitchFamily="65" charset="-120"/>
               </a:rPr>
-              <a:t>及金</a:t>
+              <a:t>及課程設計</a:t>
             </a:r>
             <a:endParaRPr lang="zh-TW" altLang="en-US" dirty="0">
               <a:solidFill>
@@ -5385,7 +5385,7 @@
               <a:r>
                 <a:rPr lang="zh-TW" altLang="en-US" sz="2400" dirty="0">
                   <a:solidFill>
-                    <a:srgbClr val="0000FF"/>
+                    <a:srgbClr val="FF0000"/>
                   </a:solidFill>
                   <a:latin typeface="標楷體" panose="03000509000000000000" pitchFamily="65" charset="-120"/>
                   <a:ea typeface="標楷體" panose="03000509000000000000" pitchFamily="65" charset="-120"/>
@@ -5395,7 +5395,7 @@
               <a:r>
                 <a:rPr lang="zh-TW" altLang="en-US" sz="2400" dirty="0" smtClean="0">
                   <a:solidFill>
-                    <a:srgbClr val="0000FF"/>
+                    <a:srgbClr val="FF0000"/>
                   </a:solidFill>
                   <a:latin typeface="標楷體" panose="03000509000000000000" pitchFamily="65" charset="-120"/>
                   <a:ea typeface="標楷體" panose="03000509000000000000" pitchFamily="65" charset="-120"/>
@@ -5404,7 +5404,7 @@
               </a:r>
               <a:endParaRPr lang="en-US" altLang="zh-TW" sz="2400" dirty="0" smtClean="0">
                 <a:solidFill>
-                  <a:srgbClr val="0000FF"/>
+                  <a:srgbClr val="FF0000"/>
                 </a:solidFill>
                 <a:latin typeface="標楷體" panose="03000509000000000000" pitchFamily="65" charset="-120"/>
                 <a:ea typeface="標楷體" panose="03000509000000000000" pitchFamily="65" charset="-120"/>
